--- a/docs/EFK_Presentation.pptx
+++ b/docs/EFK_Presentation.pptx
@@ -3949,7 +3949,7 @@
                 <a:ea typeface="Calibri" pitchFamily="34" charset="-122"/>
                 <a:cs typeface="Calibri" pitchFamily="34" charset="-120"/>
               </a:rPr>
-              <a:t>14 systems per frame</a:t>
+              <a:t>15 systems per frame</a:t>
             </a:r>
             <a:endParaRPr lang="en-US" sz="1200" dirty="0"/>
           </a:p>
@@ -7702,7 +7702,7 @@
                 <a:ea typeface="Calibri" pitchFamily="34" charset="-122"/>
                 <a:cs typeface="Calibri" pitchFamily="34" charset="-120"/>
               </a:rPr>
-              <a:t>Marks dead, adds 3s corpse Lifetime</a:t>
+              <a:t>Marks dead, disables collider, plays death SFX, adds 3s corpse Lifetime</a:t>
             </a:r>
             <a:endParaRPr lang="en-US" sz="1000" dirty="0"/>
           </a:p>
@@ -7837,7 +7837,7 @@
                 <a:ea typeface="Calibri" pitchFamily="34" charset="-122"/>
                 <a:cs typeface="Calibri" pitchFamily="34" charset="-120"/>
               </a:rPr>
-              <a:t>20+ systems executed in a carefully ordered 14-step pipeline each frame</a:t>
+              <a:t>20+ systems executed in a carefully ordered 15-step pipeline each frame</a:t>
             </a:r>
             <a:endParaRPr lang="en-US" sz="1300" dirty="0"/>
           </a:p>
@@ -7998,7 +7998,7 @@
                 <a:ea typeface="Calibri" pitchFamily="34" charset="-122"/>
                 <a:cs typeface="Calibri" pitchFamily="34" charset="-120"/>
               </a:rPr>
-              <a:t>Vision range (10u), attack range (2u)</a:t>
+              <a:t>Vision range (10u), attack range (2u), instant first strike</a:t>
             </a:r>
             <a:endParaRPr lang="en-US" sz="1100" dirty="0"/>
           </a:p>
@@ -8425,7 +8425,7 @@
                 <a:ea typeface="Calibri" pitchFamily="34" charset="-122"/>
                 <a:cs typeface="Calibri" pitchFamily="34" charset="-120"/>
               </a:rPr>
-              <a:t>10 prefab types (walls, floors, doors, stairs)</a:t>
+              <a:t>16 prefab types (wall variants, floors, doors, stairs)</a:t>
             </a:r>
             <a:endParaRPr lang="en-US" sz="1100" dirty="0"/>
           </a:p>
@@ -9936,7 +9936,7 @@
                 <a:ea typeface="Calibri" pitchFamily="34" charset="-122"/>
                 <a:cs typeface="Calibri" pitchFamily="34" charset="-120"/>
               </a:rPr>
-              <a:t>Mark dead entities</a:t>
+              <a:t>Mark dead, disable collider, death SFX</a:t>
             </a:r>
             <a:endParaRPr lang="en-US" sz="900" dirty="0"/>
           </a:p>
@@ -10368,7 +10368,7 @@
                 <a:ea typeface="Calibri" pitchFamily="34" charset="-122"/>
                 <a:cs typeface="Calibri" pitchFamily="34" charset="-120"/>
               </a:rPr>
-              <a:t>Open/close doors</a:t>
+              <a:t>Doors + door puzzles + SFX</a:t>
             </a:r>
             <a:endParaRPr lang="en-US" sz="900" dirty="0"/>
           </a:p>
@@ -10873,7 +10873,7 @@
                 <a:ea typeface="Calibri" pitchFamily="34" charset="-122"/>
                 <a:cs typeface="Calibri" pitchFamily="34" charset="-120"/>
               </a:rPr>
-              <a:t>Input → Physics → Animation → Combat → AI → World → Camera  |  Each system sees the finalized state from the previous step</a:t>
+              <a:t>Input → Physics → Animation → Combat → AI → World → Camera → Audio  |  Each system sees the finalized state from the previous step</a:t>
             </a:r>
             <a:endParaRPr lang="en-US" sz="1100" dirty="0"/>
           </a:p>

--- a/docs/EFK_Presentation.pptx
+++ b/docs/EFK_Presentation.pptx
@@ -3638,7 +3638,7 @@
                 <a:ea typeface="Calibri" pitchFamily="34" charset="-122"/>
                 <a:cs typeface="Calibri" pitchFamily="34" charset="-120"/>
               </a:rPr>
-              <a:t>13 component types</a:t>
+              <a:t>12 component types</a:t>
             </a:r>
             <a:endParaRPr lang="en-US" sz="1200" dirty="0"/>
           </a:p>
@@ -11154,7 +11154,7 @@
                 <a:ea typeface="Georgia" pitchFamily="34" charset="-122"/>
                 <a:cs typeface="Georgia" pitchFamily="34" charset="-120"/>
               </a:rPr>
-              <a:t>13</a:t>
+              <a:t>12</a:t>
             </a:r>
             <a:endParaRPr lang="en-US" sz="3200" dirty="0"/>
           </a:p>

--- a/docs/EFK_Presentation.pptx
+++ b/docs/EFK_Presentation.pptx
@@ -2484,7 +2484,7 @@
                 <a:ea typeface="Calibri" pitchFamily="34" charset="-122"/>
                 <a:cs typeface="Calibri" pitchFamily="34" charset="-120"/>
               </a:rPr>
-              <a:t>ECS framework, scene manager, time, input</a:t>
+              <a:t>ECS framework, scene manager, time, input, audio</a:t>
             </a:r>
             <a:endParaRPr lang="en-US" sz="1100" dirty="0"/>
           </a:p>
@@ -4100,7 +4100,7 @@
                 <a:ea typeface="Consolas" pitchFamily="34" charset="-122"/>
                 <a:cs typeface="Consolas" pitchFamily="34" charset="-120"/>
               </a:rPr>
-              <a:t>registry.EmplaceComponent&lt;Player&gt;(entity);                     // Marker component, no data</a:t>
+              <a:t>registry.AddComponent(entity, Player{});                              // Marker component, no data</a:t>
             </a:r>
             <a:endParaRPr lang="en-US" sz="1000" dirty="0"/>
           </a:p>
@@ -8543,7 +8543,7 @@
                 <a:ea typeface="Georgia" pitchFamily="34" charset="-122"/>
                 <a:cs typeface="Georgia" pitchFamily="34" charset="-120"/>
               </a:rPr>
-              <a:t>SCENE &amp; UI</a:t>
+              <a:t>SCENE, UI &amp; AUDIO</a:t>
             </a:r>
             <a:endParaRPr lang="en-US" sz="1300" dirty="0"/>
           </a:p>
@@ -8586,7 +8586,7 @@
                 <a:ea typeface="Calibri" pitchFamily="34" charset="-122"/>
                 <a:cs typeface="Calibri" pitchFamily="34" charset="-120"/>
               </a:rPr>
-              <a:t>Scene stack: push/pop for overlays</a:t>
+              <a:t>Scene stack: push/pop for overlays (menus, settings)</a:t>
             </a:r>
             <a:endParaRPr lang="en-US" sz="1100" dirty="0"/>
           </a:p>
@@ -8607,7 +8607,7 @@
                 <a:ea typeface="Calibri" pitchFamily="34" charset="-122"/>
                 <a:cs typeface="Calibri" pitchFamily="34" charset="-120"/>
               </a:rPr>
-              <a:t>Main Menu → Gameplay → Pause → Settings</a:t>
+              <a:t>Health bar HUD, UIButton + UISlider widgets</a:t>
             </a:r>
             <a:endParaRPr lang="en-US" sz="1100" dirty="0"/>
           </a:p>
@@ -8628,7 +8628,7 @@
                 <a:ea typeface="Calibri" pitchFamily="34" charset="-122"/>
                 <a:cs typeface="Calibri" pitchFamily="34" charset="-120"/>
               </a:rPr>
-              <a:t>Heart-based health bar HUD</a:t>
+              <a:t>AudioManager (SDL3_mixer): music + SFX playback</a:t>
             </a:r>
             <a:endParaRPr lang="en-US" sz="1100" dirty="0"/>
           </a:p>
@@ -8649,7 +8649,7 @@
                 <a:ea typeface="Calibri" pitchFamily="34" charset="-122"/>
                 <a:cs typeface="Calibri" pitchFamily="34" charset="-120"/>
               </a:rPr>
-              <a:t>UIButton + UISlider widget system</a:t>
+              <a:t>AudioEventQueue: deferred SFX (attack, death, door)</a:t>
             </a:r>
             <a:endParaRPr lang="en-US" sz="1100" dirty="0"/>
           </a:p>
@@ -10185,7 +10185,7 @@
                 <a:ea typeface="Consolas" pitchFamily="34" charset="-122"/>
                 <a:cs typeface="Consolas" pitchFamily="34" charset="-120"/>
               </a:rPr>
-              <a:t>SwitchTriggerSystem</a:t>
+              <a:t>CombatSystem</a:t>
             </a:r>
             <a:endParaRPr lang="en-US" sz="1100" dirty="0"/>
           </a:p>
@@ -10224,7 +10224,7 @@
                 <a:ea typeface="Calibri" pitchFamily="34" charset="-122"/>
                 <a:cs typeface="Calibri" pitchFamily="34" charset="-120"/>
               </a:rPr>
-              <a:t>Check floor switches</a:t>
+              <a:t>Attack timing, combo windows</a:t>
             </a:r>
             <a:endParaRPr lang="en-US" sz="900" dirty="0"/>
           </a:p>
@@ -10329,7 +10329,7 @@
                 <a:ea typeface="Consolas" pitchFamily="34" charset="-122"/>
                 <a:cs typeface="Consolas" pitchFamily="34" charset="-120"/>
               </a:rPr>
-              <a:t>DoorSystem</a:t>
+              <a:t>SwitchTriggerSystem</a:t>
             </a:r>
             <a:endParaRPr lang="en-US" sz="1100" dirty="0"/>
           </a:p>
@@ -10368,7 +10368,7 @@
                 <a:ea typeface="Calibri" pitchFamily="34" charset="-122"/>
                 <a:cs typeface="Calibri" pitchFamily="34" charset="-120"/>
               </a:rPr>
-              <a:t>Doors + door puzzles + SFX</a:t>
+              <a:t>Check floor switches</a:t>
             </a:r>
             <a:endParaRPr lang="en-US" sz="900" dirty="0"/>
           </a:p>
@@ -10473,7 +10473,7 @@
                 <a:ea typeface="Consolas" pitchFamily="34" charset="-122"/>
                 <a:cs typeface="Consolas" pitchFamily="34" charset="-120"/>
               </a:rPr>
-              <a:t>LifetimeSystem</a:t>
+              <a:t>DoorSystem + DoorPuzzleSystem</a:t>
             </a:r>
             <a:endParaRPr lang="en-US" sz="1100" dirty="0"/>
           </a:p>
@@ -10512,7 +10512,7 @@
                 <a:ea typeface="Calibri" pitchFamily="34" charset="-122"/>
                 <a:cs typeface="Calibri" pitchFamily="34" charset="-120"/>
               </a:rPr>
-              <a:t>Destroy expired</a:t>
+              <a:t>Doors, puzzles + SFX</a:t>
             </a:r>
             <a:endParaRPr lang="en-US" sz="900" dirty="0"/>
           </a:p>
@@ -10617,7 +10617,7 @@
                 <a:ea typeface="Consolas" pitchFamily="34" charset="-122"/>
                 <a:cs typeface="Consolas" pitchFamily="34" charset="-120"/>
               </a:rPr>
-              <a:t>CameraFollowSystem</a:t>
+              <a:t>LifetimeSystem</a:t>
             </a:r>
             <a:endParaRPr lang="en-US" sz="1100" dirty="0"/>
           </a:p>
@@ -10656,7 +10656,7 @@
                 <a:ea typeface="Calibri" pitchFamily="34" charset="-122"/>
                 <a:cs typeface="Calibri" pitchFamily="34" charset="-120"/>
               </a:rPr>
-              <a:t>Update camera</a:t>
+              <a:t>Destroy expired entities</a:t>
             </a:r>
             <a:endParaRPr lang="en-US" sz="900" dirty="0"/>
           </a:p>
@@ -10761,7 +10761,7 @@
                 <a:ea typeface="Consolas" pitchFamily="34" charset="-122"/>
                 <a:cs typeface="Consolas" pitchFamily="34" charset="-120"/>
               </a:rPr>
-              <a:t>UISystem</a:t>
+              <a:t>CameraFollowSystem</a:t>
             </a:r>
             <a:endParaRPr lang="en-US" sz="1100" dirty="0"/>
           </a:p>
@@ -10800,7 +10800,7 @@
                 <a:ea typeface="Calibri" pitchFamily="34" charset="-122"/>
                 <a:cs typeface="Calibri" pitchFamily="34" charset="-120"/>
               </a:rPr>
-              <a:t>Render HUD</a:t>
+              <a:t>Update camera + AudioEventQueue</a:t>
             </a:r>
             <a:endParaRPr lang="en-US" sz="900" dirty="0"/>
           </a:p>

--- a/docs/EFK_Presentation.pptx
+++ b/docs/EFK_Presentation.pptx
@@ -8201,27 +8201,6 @@
                 <a:ea typeface="Calibri" pitchFamily="34" charset="-122"/>
                 <a:cs typeface="Calibri" pitchFamily="34" charset="-120"/>
               </a:rPr>
-              <a:t>Puzzle doors linked to floor switches</a:t>
-            </a:r>
-            <a:endParaRPr lang="en-US" sz="1100" dirty="0"/>
-          </a:p>
-          <a:p>
-            <a:pPr marL="342900" indent="-342900">
-              <a:spcAft>
-                <a:spcPts val="300"/>
-              </a:spcAft>
-              <a:buSzPct val="100000"/>
-              <a:buChar char="•"/>
-            </a:pPr>
-            <a:r>
-              <a:rPr lang="en-US" sz="1100" dirty="0">
-                <a:solidFill>
-                  <a:srgbClr val="F0F0F0"/>
-                </a:solidFill>
-                <a:latin typeface="Calibri" pitchFamily="34" charset="0"/>
-                <a:ea typeface="Calibri" pitchFamily="34" charset="-122"/>
-                <a:cs typeface="Calibri" pitchFamily="34" charset="-120"/>
-              </a:rPr>
               <a:t>Door swing animation (180°/sec)</a:t>
             </a:r>
             <a:endParaRPr lang="en-US" sz="1100" dirty="0"/>
@@ -10177,7 +10156,7 @@
               <a:buNone/>
             </a:pPr>
             <a:r>
-              <a:rPr lang="en-US" sz="1100" dirty="0">
+              <a:rPr lang="en-US" sz="1100" dirty="0" err="1">
                 <a:solidFill>
                   <a:srgbClr val="F0F0F0"/>
                 </a:solidFill>
@@ -10185,7 +10164,7 @@
                 <a:ea typeface="Consolas" pitchFamily="34" charset="-122"/>
                 <a:cs typeface="Consolas" pitchFamily="34" charset="-120"/>
               </a:rPr>
-              <a:t>CombatSystem</a:t>
+              <a:t>HitTimerSystem</a:t>
             </a:r>
             <a:endParaRPr lang="en-US" sz="1100" dirty="0"/>
           </a:p>
@@ -10321,7 +10300,7 @@
               <a:buNone/>
             </a:pPr>
             <a:r>
-              <a:rPr lang="en-US" sz="1100" dirty="0">
+              <a:rPr lang="en-US" sz="1100" dirty="0" err="1">
                 <a:solidFill>
                   <a:srgbClr val="F0F0F0"/>
                 </a:solidFill>
@@ -10329,7 +10308,7 @@
                 <a:ea typeface="Consolas" pitchFamily="34" charset="-122"/>
                 <a:cs typeface="Consolas" pitchFamily="34" charset="-120"/>
               </a:rPr>
-              <a:t>SwitchTriggerSystem</a:t>
+              <a:t>DoorSystem</a:t>
             </a:r>
             <a:endParaRPr lang="en-US" sz="1100" dirty="0"/>
           </a:p>
@@ -10368,7 +10347,7 @@
                 <a:ea typeface="Calibri" pitchFamily="34" charset="-122"/>
                 <a:cs typeface="Calibri" pitchFamily="34" charset="-120"/>
               </a:rPr>
-              <a:t>Check floor switches</a:t>
+              <a:t>Door action system</a:t>
             </a:r>
             <a:endParaRPr lang="en-US" sz="900" dirty="0"/>
           </a:p>
@@ -10461,11 +10440,8 @@
           <a:bodyPr wrap="square" lIns="0" tIns="0" rIns="0" bIns="0" rtlCol="0" anchor="ctr"/>
           <a:lstStyle/>
           <a:p>
-            <a:pPr marL="0" indent="0">
-              <a:buNone/>
-            </a:pPr>
-            <a:r>
-              <a:rPr lang="en-US" sz="1100" dirty="0">
+            <a:r>
+              <a:rPr lang="en-US" sz="1100" dirty="0" err="1">
                 <a:solidFill>
                   <a:srgbClr val="F0F0F0"/>
                 </a:solidFill>
@@ -10473,7 +10449,7 @@
                 <a:ea typeface="Consolas" pitchFamily="34" charset="-122"/>
                 <a:cs typeface="Consolas" pitchFamily="34" charset="-120"/>
               </a:rPr>
-              <a:t>DoorSystem + DoorPuzzleSystem</a:t>
+              <a:t>LifetimeSystem</a:t>
             </a:r>
             <a:endParaRPr lang="en-US" sz="1100" dirty="0"/>
           </a:p>
@@ -10500,9 +10476,6 @@
           <a:bodyPr wrap="square" lIns="0" tIns="0" rIns="0" bIns="0" rtlCol="0" anchor="ctr"/>
           <a:lstStyle/>
           <a:p>
-            <a:pPr marL="0" indent="0">
-              <a:buNone/>
-            </a:pPr>
             <a:r>
               <a:rPr lang="en-US" sz="900" dirty="0">
                 <a:solidFill>
@@ -10512,7 +10485,7 @@
                 <a:ea typeface="Calibri" pitchFamily="34" charset="-122"/>
                 <a:cs typeface="Calibri" pitchFamily="34" charset="-120"/>
               </a:rPr>
-              <a:t>Doors, puzzles + SFX</a:t>
+              <a:t>Destroy expired entities</a:t>
             </a:r>
             <a:endParaRPr lang="en-US" sz="900" dirty="0"/>
           </a:p>
@@ -10605,11 +10578,8 @@
           <a:bodyPr wrap="square" lIns="0" tIns="0" rIns="0" bIns="0" rtlCol="0" anchor="ctr"/>
           <a:lstStyle/>
           <a:p>
-            <a:pPr marL="0" indent="0">
-              <a:buNone/>
-            </a:pPr>
-            <a:r>
-              <a:rPr lang="en-US" sz="1100" dirty="0">
+            <a:r>
+              <a:rPr lang="en-US" sz="1100" dirty="0" err="1">
                 <a:solidFill>
                   <a:srgbClr val="F0F0F0"/>
                 </a:solidFill>
@@ -10617,7 +10587,7 @@
                 <a:ea typeface="Consolas" pitchFamily="34" charset="-122"/>
                 <a:cs typeface="Consolas" pitchFamily="34" charset="-120"/>
               </a:rPr>
-              <a:t>LifetimeSystem</a:t>
+              <a:t>CameraFollowSystem</a:t>
             </a:r>
             <a:endParaRPr lang="en-US" sz="1100" dirty="0"/>
           </a:p>
@@ -10631,22 +10601,19 @@
         </p:nvSpPr>
         <p:spPr>
           <a:xfrm>
-            <a:off x="5074920" y="3822192"/>
-            <a:ext cx="2286000" cy="182880"/>
-          </a:xfrm>
-          <a:prstGeom prst="rect">
-            <a:avLst/>
-          </a:prstGeom>
-          <a:noFill/>
-          <a:ln/>
-        </p:spPr>
-        <p:txBody>
-          <a:bodyPr wrap="square" lIns="0" tIns="0" rIns="0" bIns="0" rtlCol="0" anchor="ctr"/>
-          <a:lstStyle/>
-          <a:p>
-            <a:pPr marL="0" indent="0">
-              <a:buNone/>
-            </a:pPr>
+            <a:off x="5074920" y="3867912"/>
+            <a:ext cx="2286000" cy="128016"/>
+          </a:xfrm>
+          <a:prstGeom prst="rect">
+            <a:avLst/>
+          </a:prstGeom>
+          <a:noFill/>
+          <a:ln/>
+        </p:spPr>
+        <p:txBody>
+          <a:bodyPr wrap="square" lIns="0" tIns="0" rIns="0" bIns="0" rtlCol="0" anchor="ctr"/>
+          <a:lstStyle/>
+          <a:p>
             <a:r>
               <a:rPr lang="en-US" sz="900" dirty="0">
                 <a:solidFill>
@@ -10656,7 +10623,18 @@
                 <a:ea typeface="Calibri" pitchFamily="34" charset="-122"/>
                 <a:cs typeface="Calibri" pitchFamily="34" charset="-120"/>
               </a:rPr>
-              <a:t>Destroy expired entities</a:t>
+              <a:t>Update camera + </a:t>
+            </a:r>
+            <a:r>
+              <a:rPr lang="en-US" sz="900" dirty="0" err="1">
+                <a:solidFill>
+                  <a:srgbClr val="8899AA"/>
+                </a:solidFill>
+                <a:latin typeface="Calibri" pitchFamily="34" charset="0"/>
+                <a:ea typeface="Calibri" pitchFamily="34" charset="-122"/>
+                <a:cs typeface="Calibri" pitchFamily="34" charset="-120"/>
+              </a:rPr>
+              <a:t>AudioEventQueue</a:t>
             </a:r>
             <a:endParaRPr lang="en-US" sz="900" dirty="0"/>
           </a:p>
@@ -10753,17 +10731,18 @@
               <a:buNone/>
             </a:pPr>
             <a:r>
-              <a:rPr lang="en-US" sz="1100" dirty="0">
-                <a:solidFill>
-                  <a:srgbClr val="F0F0F0"/>
-                </a:solidFill>
-                <a:latin typeface="Consolas" pitchFamily="34" charset="0"/>
-                <a:ea typeface="Consolas" pitchFamily="34" charset="-122"/>
-                <a:cs typeface="Consolas" pitchFamily="34" charset="-120"/>
-              </a:rPr>
-              <a:t>CameraFollowSystem</a:t>
-            </a:r>
-            <a:endParaRPr lang="en-US" sz="1100" dirty="0"/>
+              <a:rPr lang="en-US" sz="1100" dirty="0" err="1">
+                <a:solidFill>
+                  <a:schemeClr val="bg1"/>
+                </a:solidFill>
+              </a:rPr>
+              <a:t>AudioEventQueue</a:t>
+            </a:r>
+            <a:endParaRPr lang="en-US" sz="1100" dirty="0">
+              <a:solidFill>
+                <a:schemeClr val="bg1"/>
+              </a:solidFill>
+            </a:endParaRPr>
           </a:p>
         </p:txBody>
       </p:sp>
@@ -10775,7 +10754,7 @@
         </p:nvSpPr>
         <p:spPr>
           <a:xfrm>
-            <a:off x="5074920" y="4325112"/>
+            <a:off x="5074920" y="4321796"/>
             <a:ext cx="2286000" cy="182880"/>
           </a:xfrm>
           <a:prstGeom prst="rect">
@@ -10788,9 +10767,6 @@
           <a:bodyPr wrap="square" lIns="0" tIns="0" rIns="0" bIns="0" rtlCol="0" anchor="ctr"/>
           <a:lstStyle/>
           <a:p>
-            <a:pPr marL="0" indent="0">
-              <a:buNone/>
-            </a:pPr>
             <a:r>
               <a:rPr lang="en-US" sz="900" dirty="0">
                 <a:solidFill>
@@ -10800,9 +10776,15 @@
                 <a:ea typeface="Calibri" pitchFamily="34" charset="-122"/>
                 <a:cs typeface="Calibri" pitchFamily="34" charset="-120"/>
               </a:rPr>
-              <a:t>Update camera + AudioEventQueue</a:t>
-            </a:r>
-            <a:endParaRPr lang="en-US" sz="900" dirty="0"/>
+              <a:t>Play Audio</a:t>
+            </a:r>
+            <a:endParaRPr lang="en-US" sz="900" dirty="0">
+              <a:solidFill>
+                <a:schemeClr val="bg1">
+                  <a:lumMod val="75000"/>
+                </a:schemeClr>
+              </a:solidFill>
+            </a:endParaRPr>
           </a:p>
         </p:txBody>
       </p:sp>

--- a/docs/EFK_Presentation.pptx
+++ b/docs/EFK_Presentation.pptx
@@ -10965,8 +10965,8 @@
         </p:nvSpPr>
         <p:spPr>
           <a:xfrm>
-            <a:off x="548640" y="868680"/>
-            <a:ext cx="1920240" cy="914400"/>
+            <a:off x="548639" y="868680"/>
+            <a:ext cx="2385979" cy="914400"/>
           </a:xfrm>
           <a:prstGeom prst="rect">
             <a:avLst/>
@@ -10999,8 +10999,8 @@
         </p:nvSpPr>
         <p:spPr>
           <a:xfrm>
-            <a:off x="548640" y="914400"/>
-            <a:ext cx="1920240" cy="457200"/>
+            <a:off x="548639" y="914400"/>
+            <a:ext cx="2385979" cy="457200"/>
           </a:xfrm>
           <a:prstGeom prst="rect">
             <a:avLst/>
@@ -11038,8 +11038,8 @@
         </p:nvSpPr>
         <p:spPr>
           <a:xfrm>
-            <a:off x="548640" y="1371600"/>
-            <a:ext cx="1920240" cy="320040"/>
+            <a:off x="548639" y="1371600"/>
+            <a:ext cx="2385979" cy="320040"/>
           </a:xfrm>
           <a:prstGeom prst="rect">
             <a:avLst/>
@@ -11077,8 +11077,8 @@
         </p:nvSpPr>
         <p:spPr>
           <a:xfrm>
-            <a:off x="2697480" y="868680"/>
-            <a:ext cx="1920240" cy="914400"/>
+            <a:off x="3441057" y="845820"/>
+            <a:ext cx="2356841" cy="914400"/>
           </a:xfrm>
           <a:prstGeom prst="rect">
             <a:avLst/>
@@ -11111,8 +11111,8 @@
         </p:nvSpPr>
         <p:spPr>
           <a:xfrm>
-            <a:off x="2697480" y="914400"/>
-            <a:ext cx="1920240" cy="457200"/>
+            <a:off x="3441057" y="891540"/>
+            <a:ext cx="2356841" cy="457200"/>
           </a:xfrm>
           <a:prstGeom prst="rect">
             <a:avLst/>
@@ -11150,8 +11150,8 @@
         </p:nvSpPr>
         <p:spPr>
           <a:xfrm>
-            <a:off x="2697480" y="1371600"/>
-            <a:ext cx="1920240" cy="320040"/>
+            <a:off x="3441057" y="1348740"/>
+            <a:ext cx="2356841" cy="320040"/>
           </a:xfrm>
           <a:prstGeom prst="rect">
             <a:avLst/>
@@ -11189,8 +11189,8 @@
         </p:nvSpPr>
         <p:spPr>
           <a:xfrm>
-            <a:off x="4846320" y="868680"/>
-            <a:ext cx="1920240" cy="914400"/>
+            <a:off x="6304336" y="845820"/>
+            <a:ext cx="2473904" cy="914400"/>
           </a:xfrm>
           <a:prstGeom prst="rect">
             <a:avLst/>
@@ -11223,8 +11223,8 @@
         </p:nvSpPr>
         <p:spPr>
           <a:xfrm>
-            <a:off x="4846320" y="914400"/>
-            <a:ext cx="1920240" cy="457200"/>
+            <a:off x="6304335" y="891540"/>
+            <a:ext cx="2433711" cy="457200"/>
           </a:xfrm>
           <a:prstGeom prst="rect">
             <a:avLst/>
@@ -11262,8 +11262,8 @@
         </p:nvSpPr>
         <p:spPr>
           <a:xfrm>
-            <a:off x="4846320" y="1371600"/>
-            <a:ext cx="1920240" cy="320040"/>
+            <a:off x="6304336" y="1348740"/>
+            <a:ext cx="2433710" cy="320040"/>
           </a:xfrm>
           <a:prstGeom prst="rect">
             <a:avLst/>
@@ -11288,118 +11288,6 @@
                 <a:cs typeface="Calibri" pitchFamily="34" charset="-120"/>
               </a:rPr>
               <a:t>Max Entities</a:t>
-            </a:r>
-            <a:endParaRPr lang="en-US" sz="1200" dirty="0"/>
-          </a:p>
-        </p:txBody>
-      </p:sp>
-      <p:sp>
-        <p:nvSpPr>
-          <p:cNvPr id="13" name="Shape 10"/>
-          <p:cNvSpPr/>
-          <p:nvPr/>
-        </p:nvSpPr>
-        <p:spPr>
-          <a:xfrm>
-            <a:off x="6995160" y="868680"/>
-            <a:ext cx="1920240" cy="914400"/>
-          </a:xfrm>
-          <a:prstGeom prst="rect">
-            <a:avLst/>
-          </a:prstGeom>
-          <a:solidFill>
-            <a:srgbClr val="1A2332"/>
-          </a:solidFill>
-          <a:ln/>
-          <a:effectLst>
-            <a:outerShdw blurRad="50800" dist="25400" dir="8100000" algn="bl" rotWithShape="0">
-              <a:srgbClr val="000000">
-                <a:alpha val="30000"/>
-              </a:srgbClr>
-            </a:outerShdw>
-          </a:effectLst>
-        </p:spPr>
-        <p:txBody>
-          <a:bodyPr/>
-          <a:lstStyle/>
-          <a:p>
-            <a:endParaRPr lang="en-CA"/>
-          </a:p>
-        </p:txBody>
-      </p:sp>
-      <p:sp>
-        <p:nvSpPr>
-          <p:cNvPr id="14" name="Text 11"/>
-          <p:cNvSpPr/>
-          <p:nvPr/>
-        </p:nvSpPr>
-        <p:spPr>
-          <a:xfrm>
-            <a:off x="6995160" y="914400"/>
-            <a:ext cx="1920240" cy="457200"/>
-          </a:xfrm>
-          <a:prstGeom prst="rect">
-            <a:avLst/>
-          </a:prstGeom>
-          <a:noFill/>
-          <a:ln/>
-        </p:spPr>
-        <p:txBody>
-          <a:bodyPr wrap="square" lIns="0" tIns="0" rIns="0" bIns="0" rtlCol="0" anchor="ctr"/>
-          <a:lstStyle/>
-          <a:p>
-            <a:pPr marL="0" indent="0" algn="ctr">
-              <a:buNone/>
-            </a:pPr>
-            <a:r>
-              <a:rPr lang="en-US" sz="3200" b="1" dirty="0">
-                <a:solidFill>
-                  <a:srgbClr val="D4A84B"/>
-                </a:solidFill>
-                <a:latin typeface="Georgia" pitchFamily="34" charset="0"/>
-                <a:ea typeface="Georgia" pitchFamily="34" charset="-122"/>
-                <a:cs typeface="Georgia" pitchFamily="34" charset="-120"/>
-              </a:rPr>
-              <a:t>100</a:t>
-            </a:r>
-            <a:endParaRPr lang="en-US" sz="3200" dirty="0"/>
-          </a:p>
-        </p:txBody>
-      </p:sp>
-      <p:sp>
-        <p:nvSpPr>
-          <p:cNvPr id="15" name="Text 12"/>
-          <p:cNvSpPr/>
-          <p:nvPr/>
-        </p:nvSpPr>
-        <p:spPr>
-          <a:xfrm>
-            <a:off x="6995160" y="1371600"/>
-            <a:ext cx="1920240" cy="320040"/>
-          </a:xfrm>
-          <a:prstGeom prst="rect">
-            <a:avLst/>
-          </a:prstGeom>
-          <a:noFill/>
-          <a:ln/>
-        </p:spPr>
-        <p:txBody>
-          <a:bodyPr wrap="square" lIns="0" tIns="0" rIns="0" bIns="0" rtlCol="0" anchor="ctr"/>
-          <a:lstStyle/>
-          <a:p>
-            <a:pPr marL="0" indent="0" algn="ctr">
-              <a:buNone/>
-            </a:pPr>
-            <a:r>
-              <a:rPr lang="en-US" sz="1200" dirty="0">
-                <a:solidFill>
-                  <a:srgbClr val="8899AA"/>
-                </a:solidFill>
-                <a:latin typeface="Calibri" pitchFamily="34" charset="0"/>
-                <a:ea typeface="Calibri" pitchFamily="34" charset="-122"/>
-                <a:cs typeface="Calibri" pitchFamily="34" charset="-120"/>
-              </a:rPr>
-              <a:t>Bone Matrices</a:t>
             </a:r>
             <a:endParaRPr lang="en-US" sz="1200" dirty="0"/>
           </a:p>
